--- a/Final_Proposal.pptx
+++ b/Final_Proposal.pptx
@@ -17990,7 +17990,7 @@
             </a:pPr>
             <a:r>
               <a:rPr lang="en" dirty="0"/>
-              <a:t>F.R.Althaf Hussain</a:t>
+              <a:t>Abdullah Abdul Haleem</a:t>
             </a:r>
           </a:p>
           <a:p>
@@ -33614,6 +33614,9 @@
             <a:endParaRPr lang="en-US" sz="2000" b="1" dirty="0"/>
           </a:p>
           <a:p>
+            <a:pPr marL="152400" indent="0">
+              <a:buNone/>
+            </a:pPr>
             <a:r>
               <a:rPr lang="en-US" b="1" dirty="0"/>
               <a:t>Background of the Problem</a:t>
@@ -33668,9 +33671,8 @@
             <a:endParaRPr lang="en-US" sz="1100" dirty="0"/>
           </a:p>
           <a:p>
-            <a:pPr>
-              <a:buFont typeface="+mj-lt"/>
-              <a:buAutoNum type="arabicPeriod" startAt="2"/>
+            <a:pPr marL="152400" indent="0">
+              <a:buNone/>
             </a:pPr>
             <a:r>
               <a:rPr lang="en-US" b="1" dirty="0"/>
@@ -33739,9 +33741,8 @@
             <a:endParaRPr lang="en-US" sz="1100" dirty="0"/>
           </a:p>
           <a:p>
-            <a:pPr>
-              <a:buFont typeface="+mj-lt"/>
-              <a:buAutoNum type="arabicPeriod" startAt="3"/>
+            <a:pPr marL="152400" indent="0">
+              <a:buNone/>
             </a:pPr>
             <a:r>
               <a:rPr lang="en-US" b="1" dirty="0"/>
@@ -36261,8 +36262,8 @@
         </p:nvSpPr>
         <p:spPr>
           <a:xfrm>
-            <a:off x="370114" y="152400"/>
-            <a:ext cx="8773885" cy="4865913"/>
+            <a:off x="-119743" y="277587"/>
+            <a:ext cx="4201887" cy="4865913"/>
           </a:xfrm>
           <a:prstGeom prst="rect">
             <a:avLst/>
@@ -36277,22 +36278,17 @@
             <a:pPr marL="152400" indent="0">
               <a:buNone/>
             </a:pPr>
-            <a:r>
-              <a:rPr lang="en-US" sz="2000" b="1" dirty="0"/>
-              <a:t>TITLE: Coconut Leaf Disease Detection and Plantation Health             	  	Monitoring System</a:t>
-            </a:r>
+            <a:endParaRPr lang="en-US" sz="2000" b="1" dirty="0"/>
           </a:p>
           <a:p>
             <a:pPr marL="152400" indent="0">
               <a:buNone/>
             </a:pPr>
-            <a:endParaRPr lang="en-US" sz="2000" b="1" dirty="0"/>
-          </a:p>
-          <a:p>
             <a:r>
               <a:rPr lang="en-US" b="1" dirty="0"/>
-              <a:t>Background of the Problem</a:t>
-            </a:r>
+              <a:t>Problem Statement</a:t>
+            </a:r>
+            <a:endParaRPr lang="en-US" dirty="0"/>
           </a:p>
           <a:p>
             <a:pPr marL="323850" indent="-171450">
@@ -36304,7 +36300,7 @@
             </a:pPr>
             <a:r>
               <a:rPr lang="en-US" sz="1100" dirty="0"/>
-              <a:t>Coconut leaf diseases reduce crop quality and plantation productivity. </a:t>
+              <a:t>Existing disease detection methods are manual and time-consuming.  </a:t>
             </a:r>
           </a:p>
           <a:p>
@@ -36317,7 +36313,7 @@
             </a:pPr>
             <a:r>
               <a:rPr lang="en-US" sz="1100" dirty="0"/>
-              <a:t>Manual disease detection is slow and depends on human expertise. </a:t>
+              <a:t>Farmers may not have quick access to agricultural experts. </a:t>
             </a:r>
           </a:p>
           <a:p>
@@ -36330,7 +36326,7 @@
             </a:pPr>
             <a:r>
               <a:rPr lang="en-US" sz="1100" dirty="0"/>
-              <a:t>Delayed identification may increase plantation and financial losses.</a:t>
+              <a:t>Traditional systems lack automated monitoring and real-time analysis. </a:t>
             </a:r>
           </a:p>
           <a:p>
@@ -36343,13 +36339,16 @@
             <a:endParaRPr lang="en-US" sz="1100" dirty="0"/>
           </a:p>
           <a:p>
-            <a:pPr>
-              <a:buFont typeface="+mj-lt"/>
-              <a:buAutoNum type="arabicPeriod" startAt="2"/>
+            <a:pPr marL="152400" indent="0">
+              <a:buNone/>
             </a:pPr>
             <a:r>
               <a:rPr lang="en-US" b="1" dirty="0"/>
-              <a:t>Importance of the Project</a:t>
+              <a:t>Main Objective</a:t>
+            </a:r>
+            <a:r>
+              <a:rPr lang="en-US" sz="1100" dirty="0"/>
+              <a:t> </a:t>
             </a:r>
           </a:p>
           <a:p>
@@ -36362,8 +36361,27 @@
             </a:pPr>
             <a:r>
               <a:rPr lang="en-US" sz="1100" dirty="0"/>
-              <a:t>Supports early disease detection. </a:t>
-            </a:r>
+              <a:t>Develop an AI-powered web-based system for coconut leaf disease detection and plantation monitoring.</a:t>
+            </a:r>
+          </a:p>
+          <a:p>
+            <a:pPr marL="152400" indent="0">
+              <a:lnSpc>
+                <a:spcPct val="150000"/>
+              </a:lnSpc>
+              <a:buNone/>
+            </a:pPr>
+            <a:endParaRPr lang="en-US" sz="1100" dirty="0"/>
+          </a:p>
+          <a:p>
+            <a:pPr marL="152400" indent="0">
+              <a:buNone/>
+            </a:pPr>
+            <a:r>
+              <a:rPr lang="en-US" b="1" dirty="0"/>
+              <a:t>Specific Objectives</a:t>
+            </a:r>
+            <a:endParaRPr lang="en-US" sz="1100" dirty="0"/>
           </a:p>
           <a:p>
             <a:pPr marL="323850" indent="-171450">
@@ -36375,7 +36393,7 @@
             </a:pPr>
             <a:r>
               <a:rPr lang="en-US" sz="1100" dirty="0"/>
-              <a:t>Reduces plantation losses. </a:t>
+              <a:t>Detect coconut leaf diseases using CNN models. </a:t>
             </a:r>
           </a:p>
           <a:p>
@@ -36388,7 +36406,7 @@
             </a:pPr>
             <a:r>
               <a:rPr lang="en-US" sz="1100" dirty="0"/>
-              <a:t>Uses AI and Deep Learning for smart agriculture. </a:t>
+              <a:t>Estimate disease severity levels. </a:t>
             </a:r>
           </a:p>
           <a:p>
@@ -36401,26 +36419,7 @@
             </a:pPr>
             <a:r>
               <a:rPr lang="en-US" sz="1100" dirty="0"/>
-              <a:t>Provides a user-friendly web-based monitoring system. </a:t>
-            </a:r>
-          </a:p>
-          <a:p>
-            <a:pPr marL="152400" indent="0">
-              <a:lnSpc>
-                <a:spcPct val="150000"/>
-              </a:lnSpc>
-              <a:buNone/>
-            </a:pPr>
-            <a:endParaRPr lang="en-US" sz="1100" dirty="0"/>
-          </a:p>
-          <a:p>
-            <a:pPr>
-              <a:buFont typeface="+mj-lt"/>
-              <a:buAutoNum type="arabicPeriod" startAt="3"/>
-            </a:pPr>
-            <a:r>
-              <a:rPr lang="en-US" b="1" dirty="0"/>
-              <a:t>AI Model</a:t>
+              <a:t>Provide treatment recommendations. </a:t>
             </a:r>
           </a:p>
           <a:p>
@@ -36433,33 +36432,73 @@
             </a:pPr>
             <a:r>
               <a:rPr lang="en-US" sz="1100" dirty="0"/>
-              <a:t>CNN with Transfer Learning</a:t>
-            </a:r>
-          </a:p>
-          <a:p>
-            <a:pPr marL="323850" indent="-171450">
-              <a:lnSpc>
-                <a:spcPct val="150000"/>
-              </a:lnSpc>
-              <a:buFont typeface="Arial" panose="020B0604020202020204" pitchFamily="34" charset="0"/>
-              <a:buChar char="•"/>
-            </a:pPr>
-            <a:r>
-              <a:rPr lang="en-US" sz="1100" dirty="0"/>
-              <a:t>MobileNetV2 Architecture</a:t>
-            </a:r>
-          </a:p>
-          <a:p>
-            <a:pPr marL="152400" indent="0">
-              <a:lnSpc>
-                <a:spcPct val="150000"/>
-              </a:lnSpc>
-              <a:buNone/>
-            </a:pPr>
-            <a:endParaRPr lang="en-US" sz="900" dirty="0"/>
+              <a:t>Develop a dashboard for plantation monitoring. </a:t>
+            </a:r>
           </a:p>
         </p:txBody>
       </p:sp>
+      <p:pic>
+        <p:nvPicPr>
+          <p:cNvPr id="10" name="Picture 9">
+            <a:extLst>
+              <a:ext uri="{FF2B5EF4-FFF2-40B4-BE49-F238E27FC236}">
+                <a16:creationId xmlns:a16="http://schemas.microsoft.com/office/drawing/2014/main" id="{7F88216F-602E-29FE-2165-BDB38F63D93B}"/>
+              </a:ext>
+            </a:extLst>
+          </p:cNvPr>
+          <p:cNvPicPr>
+            <a:picLocks noChangeAspect="1"/>
+          </p:cNvPicPr>
+          <p:nvPr/>
+        </p:nvPicPr>
+        <p:blipFill>
+          <a:blip r:embed="rId3"/>
+          <a:srcRect l="6026" t="15537" r="6403" b="25423"/>
+          <a:stretch>
+            <a:fillRect/>
+          </a:stretch>
+        </p:blipFill>
+        <p:spPr>
+          <a:xfrm>
+            <a:off x="3918858" y="296635"/>
+            <a:ext cx="5061856" cy="2275115"/>
+          </a:xfrm>
+          <a:prstGeom prst="rect">
+            <a:avLst/>
+          </a:prstGeom>
+        </p:spPr>
+      </p:pic>
+      <p:pic>
+        <p:nvPicPr>
+          <p:cNvPr id="11" name="Picture 10" descr="Ai Vs Human Comparison Vector Symbol Stock Vector (Royalty Free) 2598701823  | Shutterstock">
+            <a:extLst>
+              <a:ext uri="{FF2B5EF4-FFF2-40B4-BE49-F238E27FC236}">
+                <a16:creationId xmlns:a16="http://schemas.microsoft.com/office/drawing/2014/main" id="{086F2F89-DA4B-E0A5-6DF2-D90FC2EBB9CE}"/>
+              </a:ext>
+            </a:extLst>
+          </p:cNvPr>
+          <p:cNvPicPr>
+            <a:picLocks noChangeAspect="1"/>
+          </p:cNvPicPr>
+          <p:nvPr/>
+        </p:nvPicPr>
+        <p:blipFill>
+          <a:blip r:embed="rId4"/>
+          <a:srcRect b="7959"/>
+          <a:stretch>
+            <a:fillRect/>
+          </a:stretch>
+        </p:blipFill>
+        <p:spPr>
+          <a:xfrm>
+            <a:off x="4678135" y="2571750"/>
+            <a:ext cx="2476500" cy="2454729"/>
+          </a:xfrm>
+          <a:prstGeom prst="rect">
+            <a:avLst/>
+          </a:prstGeom>
+        </p:spPr>
+      </p:pic>
     </p:spTree>
     <p:extLst>
       <p:ext uri="{BB962C8B-B14F-4D97-AF65-F5344CB8AC3E}">
